--- a/AI-in-Excel-for-Finance-IOFM.pptx
+++ b/AI-in-Excel-for-Finance-IOFM.pptx
@@ -26,8 +26,8 @@
     <p:sldId id="271" r:id="rId17"/>
     <p:sldId id="272" r:id="rId18"/>
     <p:sldId id="273" r:id="rId19"/>
-    <p:sldId id="274" r:id="rId20"/>
-    <p:sldId id="275" r:id="rId21"/>
+    <p:sldId id="275" r:id="rId20"/>
+    <p:sldId id="276" r:id="rId21"/>
   </p:sldIdLst>
   <p:sldSz cx="12192000" cy="6858000"/>
   <p:notesSz cx="6858000" cy="12192000"/>
@@ -156,7 +156,7 @@
     </p:spTree>
     <p:extLst>
       <p:ext uri="{BB962C8B-B14F-4D97-AF65-F5344CB8AC3E}">
-        <p14:creationId xmlns:p14="http://schemas.microsoft.com/office/powerpoint/2010/main" val="1947816429"/>
+        <p14:creationId xmlns:p14="http://schemas.microsoft.com/office/powerpoint/2010/main" val="3339030337"/>
       </p:ext>
     </p:extLst>
   </p:cSld>
@@ -389,7 +389,7 @@
           <a:p>
             <a:r>
               <a:rPr lang="en-US" dirty="0"/>
-              <a:t>We're in the ExpenseMemos tab, and each row is a messy, real-sounding expense note. Here's the big idea. The new COPILOT function puts a model right inside a formula. You give it a prompt and a cell, and it returns an answer into the grid. It recalculates like any other function, and it can fill a whole column at once. Let me build a few columns live. First, I'll categorize each memo. Watch that I give it a fixed list of categories to choose from. That one constraint is what makes the answers consistent. Next, I'll pull out the vendor. Then the dollar amount. Then I'll flag any policy concerns for a human to review. While these run, let me be honest about the limits. This is a probabilistic tool, so the answers can shift a little when you run it again. It needs the Copilot license. And it is not a calculator, so the amount column especially needs a human to check it against the receipt. Notice that this is exactly the deterministic versus probabilistic idea from earlier, made real. If it hangs, open the extracted version in your solutions file and read a few of the tricky ones out loud.</a:t>
+              <a:t>We're in the ExpenseMemos tab, and each row is a messy, real-sounding expense note. Here's the big idea. The new COPILOT function puts a model right inside a formula. You give it a prompt and a cell, and it returns an answer into the grid. It recalculates like any other function, and it can fill a whole column at once. Let me build a few columns live. First, I'll categorize each memo. Watch that I give it a fixed list of categories to choose from. That one constraint is what makes the answers consistent. Next, I'll pull out the vendor. Then the dollar amount. Then I'll flag any policy concerns. And here is a key point: because this function is vanilla, it only knows what is in the prompt, so I actually type our limits right into it, the seventy-five dollar meal cap, the hundred dollar gift cap, and so on. If I want it to know a rule, the rule goes in the prompt. While these run, let me be honest about the limits. This is a probabilistic tool, so the answers can shift a little when you run it again. It needs the Copilot license. And it is not a calculator, so the amount column especially needs a human to check it against the receipt. Notice that this is exactly the deterministic versus probabilistic idea from earlier, made real. If it hangs, open the extracted version in your solutions file and read a few of the tricky ones out loud.</a:t>
             </a:r>
           </a:p>
         </p:txBody>
@@ -911,7 +911,7 @@
           <a:p>
             <a:r>
               <a:rPr lang="en-US" dirty="0"/>
-              <a:t>Here are the three levers, and the trick is knowing which one you want. First, custom instructions. Think of these as your house style. You set your preferences once, and Copilot applies them across your workbooks. Formats, naming, how you label a variance. If you want that inside a single file, you can use a rules sheet. Second, Skills. These are saved workflows. You package a task you do all the time, give it a name, and everyone on the team runs it the same way. Third, reference files. This is how you point Copilot at your other data, like last month's close file or your chart of accounts, so it grounds its answer in the real thing. The bottom line is on the screen. Instructions shape how it behaves. Skills save what it does. Reference files give it what to look at.</a:t>
+              <a:t>Here are the three levers, and the trick is knowing which one you want. First, custom instructions, your house style, set once and applied across your workbooks. Second, Skills, saved workflows you package and then reuse by name. Third, reference files, where you point Copilot at other data so it grounds its answer in the real thing. Now here is the important caveat, and it is easy to miss. All three of these shape the Copilot chat and the agents, the conversational side. They do not feed the equals COPILOT worksheet function we used earlier. That function is vanilla. It sees your prompt and the cells you hand it, and nothing else. So for the function, you put your rules in the prompt. For the chat, you can set instructions and attach files. To show the chat side cleanly, I am switching to a completely different dataset, some regional sales numbers.</a:t>
             </a:r>
           </a:p>
         </p:txBody>
@@ -998,7 +998,7 @@
           <a:p>
             <a:r>
               <a:rPr lang="en-US" dirty="0"/>
-              <a:t>Let's do one quick, light version of this, and I'll keep it short. First, I'll give Copilot a single standing instruction. Something like, always format currency with no decimals and label variances as Favorable or Unfavorable. Then I'll re-run the summary from earlier, and you'll see it follow my format without me asking again. If we have another minute, I'll take the data-quality prompt we used at the very start and save it as a Skill, so next month it's one click instead of retyping. That's the whole idea. You teach it your style and your workflows once, and it stops being generic.</a:t>
+              <a:t>Now the chat side, and notice I have switched to a completely different dataset, regional sales. That is deliberate, because these customization features are a chat thing, not a function thing. On the left is the default. A wordy paragraph, dollars with cents, percentages with no label. On the right is the same request, after I set one standing instruction in Copilot. Whole dollars, a Growth or Decline label on every change, and three number-first bullets. Same prompt, same data. I set the house style once, and now the answer arrives the way my team reads it.</a:t>
             </a:r>
           </a:p>
         </p:txBody>
@@ -1085,7 +1085,7 @@
           <a:p>
             <a:r>
               <a:rPr lang="en-US" dirty="0"/>
-              <a:t>If there's still time and appetite, here are the natural next steps, and I'll follow the room on which one to open. Python in Excel is the one for forecasting and simulation, and the nice part is that Copilot can write the Python for you. Analyst Agent is great when you want the AI to show its work on a scenario or an exception review. Agent Mode goes further and assembles a coordinated first draft across several sheets, which you then review. And if your team cares about standards, a rules sheet bakes them right into the file. Any one of these could be its own hour, so I'll just take the one you're most curious about.</a:t>
+              <a:t>And here is a reference file, still on the sales data, still in the chat. This time I am not setting a style, I am handing Copilot a document, our reporting and chart style guide. Watch the before. A generic summary and a plain blue chart. Then I attach the style guide through the file picker and ask again. Now the summary is three number-first bullets with Growth and Decline labels, and the chart uses our brand red, sorted high to low, with data labels, exactly what the guide specifies. A policy, a codebook, a style guide, whatever holds your rules, the chat can read it and follow it. The function cannot, and that is the whole reason we keep these two ideas separate.</a:t>
             </a:r>
           </a:p>
         </p:txBody>
@@ -2333,176 +2333,9 @@
           <a:chExt cx="0" cy="0"/>
         </a:xfrm>
       </p:grpSpPr>
-      <p:sp>
-        <p:nvSpPr>
-          <p:cNvPr id="3" name="Text 0"/>
-          <p:cNvSpPr/>
-          <p:nvPr/>
-        </p:nvSpPr>
-        <p:spPr>
-          <a:xfrm>
-            <a:off x="548640" y="1874520"/>
-            <a:ext cx="8503920" cy="1737360"/>
-          </a:xfrm>
-          <a:prstGeom prst="rect">
-            <a:avLst/>
-          </a:prstGeom>
-          <a:noFill/>
-          <a:ln/>
-        </p:spPr>
-        <p:txBody>
-          <a:bodyPr wrap="square" rtlCol="0" anchor="t"/>
-          <a:lstStyle/>
-          <a:p>
-            <a:pPr marL="0" indent="0">
-              <a:buNone/>
-            </a:pPr>
-            <a:r>
-              <a:rPr lang="en-US" sz="4000" b="1" dirty="0">
-                <a:solidFill>
-                  <a:srgbClr val="CF3338"/>
-                </a:solidFill>
-                <a:latin typeface="Arial" pitchFamily="34" charset="0"/>
-                <a:ea typeface="Arial" pitchFamily="34" charset="-122"/>
-                <a:cs typeface="Arial" pitchFamily="34" charset="-120"/>
-              </a:rPr>
-              <a:t>AI in Excel for Finance &amp; Accounting Teams</a:t>
-            </a:r>
-            <a:endParaRPr lang="en-US" sz="4000" dirty="0"/>
-          </a:p>
-        </p:txBody>
-      </p:sp>
-      <p:sp>
-        <p:nvSpPr>
-          <p:cNvPr id="4" name="Text 1"/>
-          <p:cNvSpPr/>
-          <p:nvPr/>
-        </p:nvSpPr>
-        <p:spPr>
-          <a:xfrm>
-            <a:off x="566928" y="3611880"/>
-            <a:ext cx="8046720" cy="822960"/>
-          </a:xfrm>
-          <a:prstGeom prst="rect">
-            <a:avLst/>
-          </a:prstGeom>
-          <a:noFill/>
-          <a:ln/>
-        </p:spPr>
-        <p:txBody>
-          <a:bodyPr wrap="square" rtlCol="0" anchor="ctr"/>
-          <a:lstStyle/>
-          <a:p>
-            <a:pPr marL="0" indent="0">
-              <a:buNone/>
-            </a:pPr>
-            <a:r>
-              <a:rPr lang="en-US" sz="1600" dirty="0">
-                <a:solidFill>
-                  <a:srgbClr val="1F2120"/>
-                </a:solidFill>
-                <a:latin typeface="Arial" pitchFamily="34" charset="0"/>
-                <a:ea typeface="Arial" pitchFamily="34" charset="-122"/>
-                <a:cs typeface="Arial" pitchFamily="34" charset="-120"/>
-              </a:rPr>
-              <a:t>A practical, hands-on session. Copilot in the grid, the new AI functions, and the guardrails that keep them audit-ready.</a:t>
-            </a:r>
-            <a:endParaRPr lang="en-US" sz="1600" dirty="0"/>
-          </a:p>
-        </p:txBody>
-      </p:sp>
-      <p:sp>
-        <p:nvSpPr>
-          <p:cNvPr id="5" name="Text 2"/>
-          <p:cNvSpPr/>
-          <p:nvPr/>
-        </p:nvSpPr>
-        <p:spPr>
-          <a:xfrm>
-            <a:off x="566928" y="5074920"/>
-            <a:ext cx="7315200" cy="365760"/>
-          </a:xfrm>
-          <a:prstGeom prst="rect">
-            <a:avLst/>
-          </a:prstGeom>
-          <a:noFill/>
-          <a:ln/>
-        </p:spPr>
-        <p:txBody>
-          <a:bodyPr wrap="square" rtlCol="0" anchor="ctr"/>
-          <a:lstStyle/>
-          <a:p>
-            <a:pPr marL="0" indent="0">
-              <a:buNone/>
-            </a:pPr>
-            <a:r>
-              <a:rPr lang="en-US" sz="1500" b="1" dirty="0">
-                <a:solidFill>
-                  <a:srgbClr val="1F2120"/>
-                </a:solidFill>
-                <a:latin typeface="Arial" pitchFamily="34" charset="0"/>
-                <a:ea typeface="Arial" pitchFamily="34" charset="-122"/>
-                <a:cs typeface="Arial" pitchFamily="34" charset="-120"/>
-              </a:rPr>
-              <a:t>George Mount</a:t>
-            </a:r>
-            <a:r>
-              <a:rPr lang="en-US" sz="1500" dirty="0">
-                <a:solidFill>
-                  <a:srgbClr val="606060"/>
-                </a:solidFill>
-                <a:latin typeface="Arial" pitchFamily="34" charset="0"/>
-                <a:ea typeface="Arial" pitchFamily="34" charset="-122"/>
-                <a:cs typeface="Arial" pitchFamily="34" charset="-120"/>
-              </a:rPr>
-              <a:t>   ·   Stringfest Analytics</a:t>
-            </a:r>
-            <a:endParaRPr lang="en-US" sz="1500" dirty="0"/>
-          </a:p>
-        </p:txBody>
-      </p:sp>
-      <p:sp>
-        <p:nvSpPr>
-          <p:cNvPr id="6" name="Text 3"/>
-          <p:cNvSpPr/>
-          <p:nvPr/>
-        </p:nvSpPr>
-        <p:spPr>
-          <a:xfrm>
-            <a:off x="566928" y="5486400"/>
-            <a:ext cx="7315200" cy="365760"/>
-          </a:xfrm>
-          <a:prstGeom prst="rect">
-            <a:avLst/>
-          </a:prstGeom>
-          <a:noFill/>
-          <a:ln/>
-        </p:spPr>
-        <p:txBody>
-          <a:bodyPr wrap="square" rtlCol="0" anchor="ctr"/>
-          <a:lstStyle/>
-          <a:p>
-            <a:pPr marL="0" indent="0">
-              <a:buNone/>
-            </a:pPr>
-            <a:r>
-              <a:rPr lang="en-US" sz="1300" dirty="0">
-                <a:solidFill>
-                  <a:srgbClr val="606060"/>
-                </a:solidFill>
-                <a:latin typeface="Arial" pitchFamily="34" charset="0"/>
-                <a:ea typeface="Arial" pitchFamily="34" charset="-122"/>
-                <a:cs typeface="Arial" pitchFamily="34" charset="-120"/>
-              </a:rPr>
-              <a:t>IOFM Webinar   ·   August 10, 2026   ·   2:00 PM ET</a:t>
-            </a:r>
-            <a:endParaRPr lang="en-US" sz="1300" dirty="0"/>
-          </a:p>
-        </p:txBody>
-      </p:sp>
       <p:pic>
         <p:nvPicPr>
-          <p:cNvPr id="7" name="Image 1" descr="assets/iofm.png"/>
+          <p:cNvPr id="2" name="Image 0" descr="assets/sf-dark.png"/>
           <p:cNvPicPr>
             <a:picLocks noChangeAspect="1"/>
           </p:cNvPicPr>
@@ -2516,6 +2349,197 @@
         </p:blipFill>
         <p:spPr>
           <a:xfrm>
+            <a:off x="548640" y="502920"/>
+            <a:ext cx="3291840" cy="451714"/>
+          </a:xfrm>
+          <a:prstGeom prst="rect">
+            <a:avLst/>
+          </a:prstGeom>
+        </p:spPr>
+      </p:pic>
+      <p:sp>
+        <p:nvSpPr>
+          <p:cNvPr id="3" name="Text 0"/>
+          <p:cNvSpPr/>
+          <p:nvPr/>
+        </p:nvSpPr>
+        <p:spPr>
+          <a:xfrm>
+            <a:off x="548640" y="1874520"/>
+            <a:ext cx="8503920" cy="1737360"/>
+          </a:xfrm>
+          <a:prstGeom prst="rect">
+            <a:avLst/>
+          </a:prstGeom>
+          <a:noFill/>
+          <a:ln/>
+        </p:spPr>
+        <p:txBody>
+          <a:bodyPr wrap="square" rtlCol="0" anchor="t"/>
+          <a:lstStyle/>
+          <a:p>
+            <a:pPr marL="0" indent="0">
+              <a:buNone/>
+            </a:pPr>
+            <a:r>
+              <a:rPr lang="en-US" sz="4000" b="1" dirty="0">
+                <a:solidFill>
+                  <a:srgbClr val="CF3338"/>
+                </a:solidFill>
+                <a:latin typeface="Arial" pitchFamily="34" charset="0"/>
+                <a:ea typeface="Arial" pitchFamily="34" charset="-122"/>
+                <a:cs typeface="Arial" pitchFamily="34" charset="-120"/>
+              </a:rPr>
+              <a:t>AI in Excel for Finance &amp; Accounting Teams</a:t>
+            </a:r>
+            <a:endParaRPr lang="en-US" sz="4000" dirty="0"/>
+          </a:p>
+        </p:txBody>
+      </p:sp>
+      <p:sp>
+        <p:nvSpPr>
+          <p:cNvPr id="4" name="Text 1"/>
+          <p:cNvSpPr/>
+          <p:nvPr/>
+        </p:nvSpPr>
+        <p:spPr>
+          <a:xfrm>
+            <a:off x="566928" y="3611880"/>
+            <a:ext cx="8046720" cy="822960"/>
+          </a:xfrm>
+          <a:prstGeom prst="rect">
+            <a:avLst/>
+          </a:prstGeom>
+          <a:noFill/>
+          <a:ln/>
+        </p:spPr>
+        <p:txBody>
+          <a:bodyPr wrap="square" rtlCol="0" anchor="ctr"/>
+          <a:lstStyle/>
+          <a:p>
+            <a:pPr marL="0" indent="0">
+              <a:buNone/>
+            </a:pPr>
+            <a:r>
+              <a:rPr lang="en-US" sz="1600" dirty="0">
+                <a:solidFill>
+                  <a:srgbClr val="1F2120"/>
+                </a:solidFill>
+                <a:latin typeface="Arial" pitchFamily="34" charset="0"/>
+                <a:ea typeface="Arial" pitchFamily="34" charset="-122"/>
+                <a:cs typeface="Arial" pitchFamily="34" charset="-120"/>
+              </a:rPr>
+              <a:t>A practical, hands-on session. Copilot in the grid, the new AI functions, and the guardrails that keep them audit-ready.</a:t>
+            </a:r>
+            <a:endParaRPr lang="en-US" sz="1600" dirty="0"/>
+          </a:p>
+        </p:txBody>
+      </p:sp>
+      <p:sp>
+        <p:nvSpPr>
+          <p:cNvPr id="5" name="Text 2"/>
+          <p:cNvSpPr/>
+          <p:nvPr/>
+        </p:nvSpPr>
+        <p:spPr>
+          <a:xfrm>
+            <a:off x="566928" y="5074920"/>
+            <a:ext cx="7315200" cy="365760"/>
+          </a:xfrm>
+          <a:prstGeom prst="rect">
+            <a:avLst/>
+          </a:prstGeom>
+          <a:noFill/>
+          <a:ln/>
+        </p:spPr>
+        <p:txBody>
+          <a:bodyPr wrap="square" rtlCol="0" anchor="ctr"/>
+          <a:lstStyle/>
+          <a:p>
+            <a:pPr marL="0" indent="0">
+              <a:buNone/>
+            </a:pPr>
+            <a:r>
+              <a:rPr lang="en-US" sz="1500" b="1" dirty="0">
+                <a:solidFill>
+                  <a:srgbClr val="1F2120"/>
+                </a:solidFill>
+                <a:latin typeface="Arial" pitchFamily="34" charset="0"/>
+                <a:ea typeface="Arial" pitchFamily="34" charset="-122"/>
+                <a:cs typeface="Arial" pitchFamily="34" charset="-120"/>
+              </a:rPr>
+              <a:t>George Mount</a:t>
+            </a:r>
+            <a:r>
+              <a:rPr lang="en-US" sz="1500" dirty="0">
+                <a:solidFill>
+                  <a:srgbClr val="606060"/>
+                </a:solidFill>
+                <a:latin typeface="Arial" pitchFamily="34" charset="0"/>
+                <a:ea typeface="Arial" pitchFamily="34" charset="-122"/>
+                <a:cs typeface="Arial" pitchFamily="34" charset="-120"/>
+              </a:rPr>
+              <a:t>   ·   Stringfest Analytics</a:t>
+            </a:r>
+            <a:endParaRPr lang="en-US" sz="1500" dirty="0"/>
+          </a:p>
+        </p:txBody>
+      </p:sp>
+      <p:sp>
+        <p:nvSpPr>
+          <p:cNvPr id="6" name="Text 3"/>
+          <p:cNvSpPr/>
+          <p:nvPr/>
+        </p:nvSpPr>
+        <p:spPr>
+          <a:xfrm>
+            <a:off x="566928" y="5486400"/>
+            <a:ext cx="7315200" cy="365760"/>
+          </a:xfrm>
+          <a:prstGeom prst="rect">
+            <a:avLst/>
+          </a:prstGeom>
+          <a:noFill/>
+          <a:ln/>
+        </p:spPr>
+        <p:txBody>
+          <a:bodyPr wrap="square" rtlCol="0" anchor="ctr"/>
+          <a:lstStyle/>
+          <a:p>
+            <a:pPr marL="0" indent="0">
+              <a:buNone/>
+            </a:pPr>
+            <a:r>
+              <a:rPr lang="en-US" sz="1300" dirty="0">
+                <a:solidFill>
+                  <a:srgbClr val="606060"/>
+                </a:solidFill>
+                <a:latin typeface="Arial" pitchFamily="34" charset="0"/>
+                <a:ea typeface="Arial" pitchFamily="34" charset="-122"/>
+                <a:cs typeface="Arial" pitchFamily="34" charset="-120"/>
+              </a:rPr>
+              <a:t>IOFM Webinar   ·   August 10, 2026   ·   2:00 PM ET</a:t>
+            </a:r>
+            <a:endParaRPr lang="en-US" sz="1300" dirty="0"/>
+          </a:p>
+        </p:txBody>
+      </p:sp>
+      <p:pic>
+        <p:nvPicPr>
+          <p:cNvPr id="7" name="Image 1" descr="assets/iofm.png"/>
+          <p:cNvPicPr>
+            <a:picLocks noChangeAspect="1"/>
+          </p:cNvPicPr>
+          <p:nvPr/>
+        </p:nvPicPr>
+        <p:blipFill>
+          <a:blip r:embed="rId4"/>
+          <a:stretch>
+            <a:fillRect/>
+          </a:stretch>
+        </p:blipFill>
+        <p:spPr>
+          <a:xfrm>
             <a:off x="566928" y="5989320"/>
             <a:ext cx="1371600" cy="367589"/>
           </a:xfrm>
@@ -2533,7 +2557,7 @@
           <p:nvPr/>
         </p:nvPicPr>
         <p:blipFill>
-          <a:blip r:embed="rId4"/>
+          <a:blip r:embed="rId5"/>
           <a:stretch>
             <a:fillRect/>
           </a:stretch>
@@ -5245,14 +5269,48 @@
       </p:sp>
       <p:sp>
         <p:nvSpPr>
-          <p:cNvPr id="18" name="Text 16"/>
-          <p:cNvSpPr/>
-          <p:nvPr/>
-        </p:nvSpPr>
-        <p:spPr>
-          <a:xfrm>
-            <a:off x="548640" y="5577840"/>
-            <a:ext cx="10972800" cy="548640"/>
+          <p:cNvPr id="18" name="Shape 16"/>
+          <p:cNvSpPr/>
+          <p:nvPr/>
+        </p:nvSpPr>
+        <p:spPr>
+          <a:xfrm>
+            <a:off x="548640" y="5504688"/>
+            <a:ext cx="10058400" cy="676656"/>
+          </a:xfrm>
+          <a:prstGeom prst="roundRect">
+            <a:avLst>
+              <a:gd name="adj" fmla="val 8108"/>
+            </a:avLst>
+          </a:prstGeom>
+          <a:solidFill>
+            <a:srgbClr val="F3E6E6"/>
+          </a:solidFill>
+          <a:ln w="12700">
+            <a:solidFill>
+              <a:srgbClr val="CF3338"/>
+            </a:solidFill>
+            <a:prstDash val="solid"/>
+          </a:ln>
+        </p:spPr>
+        <p:txBody>
+          <a:bodyPr/>
+          <a:lstStyle/>
+          <a:p>
+            <a:endParaRPr lang="en-US"/>
+          </a:p>
+        </p:txBody>
+      </p:sp>
+      <p:sp>
+        <p:nvSpPr>
+          <p:cNvPr id="19" name="Text 17"/>
+          <p:cNvSpPr/>
+          <p:nvPr/>
+        </p:nvSpPr>
+        <p:spPr>
+          <a:xfrm>
+            <a:off x="777240" y="5541264"/>
+            <a:ext cx="9601200" cy="603504"/>
           </a:xfrm>
           <a:prstGeom prst="rect">
             <a:avLst/>
@@ -5268,7 +5326,7 @@
               <a:buNone/>
             </a:pPr>
             <a:r>
-              <a:rPr lang="en-US" sz="1500" b="1" dirty="0">
+              <a:rPr lang="en-US" sz="1300" b="1" dirty="0">
                 <a:solidFill>
                   <a:srgbClr val="CF3338"/>
                 </a:solidFill>
@@ -5276,10 +5334,10 @@
                 <a:ea typeface="Arial" pitchFamily="34" charset="-122"/>
                 <a:cs typeface="Arial" pitchFamily="34" charset="-120"/>
               </a:rPr>
-              <a:t>Bottom line:  </a:t>
-            </a:r>
-            <a:r>
-              <a:rPr lang="en-US" sz="1500" dirty="0">
+              <a:t>Heads up:  </a:t>
+            </a:r>
+            <a:r>
+              <a:rPr lang="en-US" sz="1300" dirty="0">
                 <a:solidFill>
                   <a:srgbClr val="1F2120"/>
                 </a:solidFill>
@@ -5287,15 +5345,15 @@
                 <a:ea typeface="Arial" pitchFamily="34" charset="-122"/>
                 <a:cs typeface="Arial" pitchFamily="34" charset="-120"/>
               </a:rPr>
-              <a:t>instructions shape how it behaves, Skills save what it does, and reference files give it what to look at.</a:t>
-            </a:r>
-            <a:endParaRPr lang="en-US" sz="1500" dirty="0"/>
+              <a:t>these shape the Copilot chat and agents, not the =COPILOT() worksheet function. The function is vanilla: your prompt plus the cells you point at.</a:t>
+            </a:r>
+            <a:endParaRPr lang="en-US" sz="1300" dirty="0"/>
           </a:p>
         </p:txBody>
       </p:sp>
       <p:pic>
         <p:nvPicPr>
-          <p:cNvPr id="19" name="Image 0" descr="assets/chevron-red.png"/>
+          <p:cNvPr id="20" name="Image 0" descr="assets/chevron-red.png"/>
           <p:cNvPicPr>
             <a:picLocks noChangeAspect="1"/>
           </p:cNvPicPr>
@@ -5352,20 +5410,61 @@
       </p:grpSpPr>
       <p:sp>
         <p:nvSpPr>
-          <p:cNvPr id="2" name="Shape 0"/>
-          <p:cNvSpPr/>
-          <p:nvPr/>
-        </p:nvSpPr>
-        <p:spPr>
-          <a:xfrm>
-            <a:off x="8229600" y="0"/>
-            <a:ext cx="3962095" cy="6858000"/>
-          </a:xfrm>
-          <a:prstGeom prst="rect">
-            <a:avLst/>
+          <p:cNvPr id="2" name="Text 0"/>
+          <p:cNvSpPr/>
+          <p:nvPr/>
+        </p:nvSpPr>
+        <p:spPr>
+          <a:xfrm>
+            <a:off x="548640" y="457200"/>
+            <a:ext cx="11247120" cy="914400"/>
+          </a:xfrm>
+          <a:prstGeom prst="rect">
+            <a:avLst/>
+          </a:prstGeom>
+          <a:noFill/>
+          <a:ln/>
+        </p:spPr>
+        <p:txBody>
+          <a:bodyPr wrap="square" rtlCol="0" anchor="t"/>
+          <a:lstStyle/>
+          <a:p>
+            <a:pPr marL="0" indent="0" algn="l">
+              <a:buNone/>
+            </a:pPr>
+            <a:r>
+              <a:rPr lang="en-US" sz="2800" b="1" dirty="0">
+                <a:solidFill>
+                  <a:srgbClr val="1F2120"/>
+                </a:solidFill>
+                <a:latin typeface="Arial" pitchFamily="34" charset="0"/>
+                <a:ea typeface="Arial" pitchFamily="34" charset="-122"/>
+                <a:cs typeface="Arial" pitchFamily="34" charset="-120"/>
+              </a:rPr>
+              <a:t>Custom instructions change how the answer arrives</a:t>
+            </a:r>
+            <a:endParaRPr lang="en-US" sz="2800" dirty="0"/>
+          </a:p>
+        </p:txBody>
+      </p:sp>
+      <p:sp>
+        <p:nvSpPr>
+          <p:cNvPr id="3" name="Shape 1"/>
+          <p:cNvSpPr/>
+          <p:nvPr/>
+        </p:nvSpPr>
+        <p:spPr>
+          <a:xfrm>
+            <a:off x="548640" y="1261872"/>
+            <a:ext cx="11091672" cy="841248"/>
+          </a:xfrm>
+          <a:prstGeom prst="roundRect">
+            <a:avLst>
+              <a:gd name="adj" fmla="val 7609"/>
+            </a:avLst>
           </a:prstGeom>
           <a:solidFill>
-            <a:srgbClr val="CF3338"/>
+            <a:srgbClr val="F3E6E6"/>
           </a:solidFill>
           <a:ln w="12700">
             <a:solidFill>
@@ -5382,9 +5481,549 @@
           </a:p>
         </p:txBody>
       </p:sp>
+      <p:sp>
+        <p:nvSpPr>
+          <p:cNvPr id="4" name="Text 2"/>
+          <p:cNvSpPr/>
+          <p:nvPr/>
+        </p:nvSpPr>
+        <p:spPr>
+          <a:xfrm>
+            <a:off x="777240" y="1335024"/>
+            <a:ext cx="10607040" cy="694944"/>
+          </a:xfrm>
+          <a:prstGeom prst="rect">
+            <a:avLst/>
+          </a:prstGeom>
+          <a:noFill/>
+          <a:ln/>
+        </p:spPr>
+        <p:txBody>
+          <a:bodyPr wrap="square" rtlCol="0" anchor="ctr"/>
+          <a:lstStyle/>
+          <a:p>
+            <a:pPr marL="0" indent="0">
+              <a:lnSpc>
+                <a:spcPct val="100000"/>
+              </a:lnSpc>
+              <a:buNone/>
+            </a:pPr>
+            <a:r>
+              <a:rPr lang="en-US" sz="1300" b="1" dirty="0">
+                <a:solidFill>
+                  <a:srgbClr val="CF3338"/>
+                </a:solidFill>
+                <a:latin typeface="Arial" pitchFamily="34" charset="0"/>
+                <a:ea typeface="Arial" pitchFamily="34" charset="-122"/>
+                <a:cs typeface="Arial" pitchFamily="34" charset="-120"/>
+              </a:rPr>
+              <a:t>Set once (Copilot chat):  </a:t>
+            </a:r>
+            <a:r>
+              <a:rPr lang="en-US" sz="1300" i="1" dirty="0">
+                <a:solidFill>
+                  <a:srgbClr val="1F2120"/>
+                </a:solidFill>
+                <a:latin typeface="Arial" pitchFamily="34" charset="0"/>
+                <a:ea typeface="Arial" pitchFamily="34" charset="-122"/>
+                <a:cs typeface="Arial" pitchFamily="34" charset="-120"/>
+              </a:rPr>
+              <a:t>Format currency as $#,##0. Label year-over-year change as Growth or Decline. Give summaries as 3 bullets, lead with the number. One decimal on percentages.</a:t>
+            </a:r>
+            <a:endParaRPr lang="en-US" sz="1300" dirty="0"/>
+          </a:p>
+        </p:txBody>
+      </p:sp>
+      <p:sp>
+        <p:nvSpPr>
+          <p:cNvPr id="5" name="Shape 3"/>
+          <p:cNvSpPr/>
+          <p:nvPr/>
+        </p:nvSpPr>
+        <p:spPr>
+          <a:xfrm>
+            <a:off x="548640" y="2377440"/>
+            <a:ext cx="5257800" cy="2880360"/>
+          </a:xfrm>
+          <a:prstGeom prst="roundRect">
+            <a:avLst>
+              <a:gd name="adj" fmla="val 2857"/>
+            </a:avLst>
+          </a:prstGeom>
+          <a:solidFill>
+            <a:srgbClr val="FFFFFF"/>
+          </a:solidFill>
+          <a:ln w="12700">
+            <a:solidFill>
+              <a:srgbClr val="D8D5C8"/>
+            </a:solidFill>
+            <a:prstDash val="solid"/>
+          </a:ln>
+        </p:spPr>
+        <p:txBody>
+          <a:bodyPr/>
+          <a:lstStyle/>
+          <a:p>
+            <a:endParaRPr lang="en-US"/>
+          </a:p>
+        </p:txBody>
+      </p:sp>
+      <p:sp>
+        <p:nvSpPr>
+          <p:cNvPr id="6" name="Text 4"/>
+          <p:cNvSpPr/>
+          <p:nvPr/>
+        </p:nvSpPr>
+        <p:spPr>
+          <a:xfrm>
+            <a:off x="841248" y="2505456"/>
+            <a:ext cx="4663440" cy="384048"/>
+          </a:xfrm>
+          <a:prstGeom prst="rect">
+            <a:avLst/>
+          </a:prstGeom>
+          <a:noFill/>
+          <a:ln/>
+        </p:spPr>
+        <p:txBody>
+          <a:bodyPr wrap="square" rtlCol="0" anchor="ctr"/>
+          <a:lstStyle/>
+          <a:p>
+            <a:pPr marL="0" indent="0">
+              <a:buNone/>
+            </a:pPr>
+            <a:r>
+              <a:rPr lang="en-US" sz="1600" b="1" dirty="0">
+                <a:solidFill>
+                  <a:srgbClr val="8A8A8A"/>
+                </a:solidFill>
+                <a:latin typeface="Arial" pitchFamily="34" charset="0"/>
+                <a:ea typeface="Arial" pitchFamily="34" charset="-122"/>
+                <a:cs typeface="Arial" pitchFamily="34" charset="-120"/>
+              </a:rPr>
+              <a:t>Before</a:t>
+            </a:r>
+            <a:endParaRPr lang="en-US" sz="1600" dirty="0"/>
+          </a:p>
+        </p:txBody>
+      </p:sp>
+      <p:sp>
+        <p:nvSpPr>
+          <p:cNvPr id="7" name="Text 5"/>
+          <p:cNvSpPr/>
+          <p:nvPr/>
+        </p:nvSpPr>
+        <p:spPr>
+          <a:xfrm>
+            <a:off x="914400" y="2944368"/>
+            <a:ext cx="4572000" cy="2240280"/>
+          </a:xfrm>
+          <a:prstGeom prst="rect">
+            <a:avLst/>
+          </a:prstGeom>
+          <a:noFill/>
+          <a:ln/>
+        </p:spPr>
+        <p:txBody>
+          <a:bodyPr wrap="square" rtlCol="0" anchor="t"/>
+          <a:lstStyle/>
+          <a:p>
+            <a:pPr marL="0" indent="0">
+              <a:lnSpc>
+                <a:spcPct val="105000"/>
+              </a:lnSpc>
+              <a:spcAft>
+                <a:spcPts val="900"/>
+              </a:spcAft>
+              <a:buNone/>
+            </a:pPr>
+            <a:r>
+              <a:rPr lang="en-US" sz="1350" b="1" dirty="0">
+                <a:solidFill>
+                  <a:srgbClr val="1F2120"/>
+                </a:solidFill>
+                <a:latin typeface="Arial" pitchFamily="34" charset="0"/>
+                <a:ea typeface="Arial" pitchFamily="34" charset="-122"/>
+                <a:cs typeface="Arial" pitchFamily="34" charset="-120"/>
+              </a:rPr>
+              <a:t>Revenue was 4,218,500.00 in the West, up 12.3 percent,</a:t>
+            </a:r>
+            <a:endParaRPr lang="en-US" sz="1350" dirty="0"/>
+          </a:p>
+          <a:p>
+            <a:pPr marL="0" indent="0">
+              <a:lnSpc>
+                <a:spcPct val="105000"/>
+              </a:lnSpc>
+              <a:spcAft>
+                <a:spcPts val="900"/>
+              </a:spcAft>
+              <a:buNone/>
+            </a:pPr>
+            <a:r>
+              <a:rPr lang="en-US" sz="1350" b="1" dirty="0">
+                <a:solidFill>
+                  <a:srgbClr val="1F2120"/>
+                </a:solidFill>
+                <a:latin typeface="Arial" pitchFamily="34" charset="0"/>
+                <a:ea typeface="Arial" pitchFamily="34" charset="-122"/>
+                <a:cs typeface="Arial" pitchFamily="34" charset="-120"/>
+              </a:rPr>
+              <a:t>the Northeast came in at 3,860,200.00, down 3.0 percent,</a:t>
+            </a:r>
+            <a:endParaRPr lang="en-US" sz="1350" dirty="0"/>
+          </a:p>
+          <a:p>
+            <a:pPr marL="0" indent="0">
+              <a:lnSpc>
+                <a:spcPct val="105000"/>
+              </a:lnSpc>
+              <a:spcAft>
+                <a:spcPts val="900"/>
+              </a:spcAft>
+              <a:buNone/>
+            </a:pPr>
+            <a:r>
+              <a:rPr lang="en-US" sz="1350" b="1" dirty="0">
+                <a:solidFill>
+                  <a:srgbClr val="1F2120"/>
+                </a:solidFill>
+                <a:latin typeface="Arial" pitchFamily="34" charset="0"/>
+                <a:ea typeface="Arial" pitchFamily="34" charset="-122"/>
+                <a:cs typeface="Arial" pitchFamily="34" charset="-120"/>
+              </a:rPr>
+              <a:t>the Southeast was 2,974,300.00…</a:t>
+            </a:r>
+            <a:endParaRPr lang="en-US" sz="1350" dirty="0"/>
+          </a:p>
+          <a:p>
+            <a:pPr marL="0" indent="0">
+              <a:lnSpc>
+                <a:spcPct val="105000"/>
+              </a:lnSpc>
+              <a:spcAft>
+                <a:spcPts val="900"/>
+              </a:spcAft>
+              <a:buNone/>
+            </a:pPr>
+            <a:r>
+              <a:rPr lang="en-US" sz="1350" i="1" dirty="0">
+                <a:solidFill>
+                  <a:srgbClr val="9A9A9A"/>
+                </a:solidFill>
+                <a:latin typeface="Arial" pitchFamily="34" charset="0"/>
+                <a:ea typeface="Arial" pitchFamily="34" charset="-122"/>
+                <a:cs typeface="Arial" pitchFamily="34" charset="-120"/>
+              </a:rPr>
+              <a:t>(one paragraph, cents, no labels)</a:t>
+            </a:r>
+            <a:endParaRPr lang="en-US" sz="1350" dirty="0"/>
+          </a:p>
+        </p:txBody>
+      </p:sp>
+      <p:sp>
+        <p:nvSpPr>
+          <p:cNvPr id="8" name="Shape 6"/>
+          <p:cNvSpPr/>
+          <p:nvPr/>
+        </p:nvSpPr>
+        <p:spPr>
+          <a:xfrm>
+            <a:off x="6355080" y="2377440"/>
+            <a:ext cx="5257800" cy="2880360"/>
+          </a:xfrm>
+          <a:prstGeom prst="roundRect">
+            <a:avLst>
+              <a:gd name="adj" fmla="val 2857"/>
+            </a:avLst>
+          </a:prstGeom>
+          <a:solidFill>
+            <a:srgbClr val="FFFFFF"/>
+          </a:solidFill>
+          <a:ln w="12700">
+            <a:solidFill>
+              <a:srgbClr val="D8D5C8"/>
+            </a:solidFill>
+            <a:prstDash val="solid"/>
+          </a:ln>
+        </p:spPr>
+        <p:txBody>
+          <a:bodyPr/>
+          <a:lstStyle/>
+          <a:p>
+            <a:endParaRPr lang="en-US"/>
+          </a:p>
+        </p:txBody>
+      </p:sp>
+      <p:sp>
+        <p:nvSpPr>
+          <p:cNvPr id="9" name="Text 7"/>
+          <p:cNvSpPr/>
+          <p:nvPr/>
+        </p:nvSpPr>
+        <p:spPr>
+          <a:xfrm>
+            <a:off x="6647688" y="2505456"/>
+            <a:ext cx="4663440" cy="384048"/>
+          </a:xfrm>
+          <a:prstGeom prst="rect">
+            <a:avLst/>
+          </a:prstGeom>
+          <a:noFill/>
+          <a:ln/>
+        </p:spPr>
+        <p:txBody>
+          <a:bodyPr wrap="square" rtlCol="0" anchor="ctr"/>
+          <a:lstStyle/>
+          <a:p>
+            <a:pPr marL="0" indent="0">
+              <a:buNone/>
+            </a:pPr>
+            <a:r>
+              <a:rPr lang="en-US" sz="1600" b="1" dirty="0">
+                <a:solidFill>
+                  <a:srgbClr val="CF3338"/>
+                </a:solidFill>
+                <a:latin typeface="Arial" pitchFamily="34" charset="0"/>
+                <a:ea typeface="Arial" pitchFamily="34" charset="-122"/>
+                <a:cs typeface="Arial" pitchFamily="34" charset="-120"/>
+              </a:rPr>
+              <a:t>After</a:t>
+            </a:r>
+            <a:endParaRPr lang="en-US" sz="1600" dirty="0"/>
+          </a:p>
+        </p:txBody>
+      </p:sp>
+      <p:sp>
+        <p:nvSpPr>
+          <p:cNvPr id="10" name="Text 8"/>
+          <p:cNvSpPr/>
+          <p:nvPr/>
+        </p:nvSpPr>
+        <p:spPr>
+          <a:xfrm>
+            <a:off x="6720840" y="2944368"/>
+            <a:ext cx="4572000" cy="2240280"/>
+          </a:xfrm>
+          <a:prstGeom prst="rect">
+            <a:avLst/>
+          </a:prstGeom>
+          <a:noFill/>
+          <a:ln/>
+        </p:spPr>
+        <p:txBody>
+          <a:bodyPr wrap="square" rtlCol="0" anchor="t"/>
+          <a:lstStyle/>
+          <a:p>
+            <a:pPr marL="0" indent="0">
+              <a:lnSpc>
+                <a:spcPct val="105000"/>
+              </a:lnSpc>
+              <a:buNone/>
+            </a:pPr>
+            <a:r>
+              <a:rPr lang="en-US" sz="1350" b="1" dirty="0">
+                <a:solidFill>
+                  <a:srgbClr val="1F2120"/>
+                </a:solidFill>
+                <a:latin typeface="Arial" pitchFamily="34" charset="0"/>
+                <a:ea typeface="Arial" pitchFamily="34" charset="-122"/>
+                <a:cs typeface="Arial" pitchFamily="34" charset="-120"/>
+              </a:rPr>
+              <a:t>$4,218,500 West</a:t>
+            </a:r>
+            <a:r>
+              <a:rPr lang="en-US" sz="1350" dirty="0">
+                <a:solidFill>
+                  <a:srgbClr val="606060"/>
+                </a:solidFill>
+                <a:latin typeface="Arial" pitchFamily="34" charset="0"/>
+                <a:ea typeface="Arial" pitchFamily="34" charset="-122"/>
+                <a:cs typeface="Arial" pitchFamily="34" charset="-120"/>
+              </a:rPr>
+              <a:t>  · 12.3% Growth</a:t>
+            </a:r>
+            <a:endParaRPr lang="en-US" sz="1350" dirty="0"/>
+          </a:p>
+          <a:p>
+            <a:pPr marL="0" indent="0">
+              <a:lnSpc>
+                <a:spcPct val="105000"/>
+              </a:lnSpc>
+              <a:buNone/>
+            </a:pPr>
+            <a:r>
+              <a:rPr lang="en-US" sz="1350" b="1" dirty="0">
+                <a:solidFill>
+                  <a:srgbClr val="1F2120"/>
+                </a:solidFill>
+                <a:latin typeface="Arial" pitchFamily="34" charset="0"/>
+                <a:ea typeface="Arial" pitchFamily="34" charset="-122"/>
+                <a:cs typeface="Arial" pitchFamily="34" charset="-120"/>
+              </a:rPr>
+              <a:t>$3,860,200 Northeast</a:t>
+            </a:r>
+            <a:r>
+              <a:rPr lang="en-US" sz="1350" dirty="0">
+                <a:solidFill>
+                  <a:srgbClr val="606060"/>
+                </a:solidFill>
+                <a:latin typeface="Arial" pitchFamily="34" charset="0"/>
+                <a:ea typeface="Arial" pitchFamily="34" charset="-122"/>
+                <a:cs typeface="Arial" pitchFamily="34" charset="-120"/>
+              </a:rPr>
+              <a:t>  · 3.0% Decline</a:t>
+            </a:r>
+            <a:endParaRPr lang="en-US" sz="1350" dirty="0"/>
+          </a:p>
+          <a:p>
+            <a:pPr marL="0" indent="0">
+              <a:lnSpc>
+                <a:spcPct val="105000"/>
+              </a:lnSpc>
+              <a:buNone/>
+            </a:pPr>
+            <a:r>
+              <a:rPr lang="en-US" sz="1350" b="1" dirty="0">
+                <a:solidFill>
+                  <a:srgbClr val="1F2120"/>
+                </a:solidFill>
+                <a:latin typeface="Arial" pitchFamily="34" charset="0"/>
+                <a:ea typeface="Arial" pitchFamily="34" charset="-122"/>
+                <a:cs typeface="Arial" pitchFamily="34" charset="-120"/>
+              </a:rPr>
+              <a:t>$2,974,300 Southeast</a:t>
+            </a:r>
+            <a:r>
+              <a:rPr lang="en-US" sz="1350" dirty="0">
+                <a:solidFill>
+                  <a:srgbClr val="606060"/>
+                </a:solidFill>
+                <a:latin typeface="Arial" pitchFamily="34" charset="0"/>
+                <a:ea typeface="Arial" pitchFamily="34" charset="-122"/>
+                <a:cs typeface="Arial" pitchFamily="34" charset="-120"/>
+              </a:rPr>
+              <a:t>  · 14.0% Growth</a:t>
+            </a:r>
+            <a:endParaRPr lang="en-US" sz="1350" dirty="0"/>
+          </a:p>
+          <a:p>
+            <a:pPr marL="0" indent="0">
+              <a:lnSpc>
+                <a:spcPct val="105000"/>
+              </a:lnSpc>
+              <a:spcAft>
+                <a:spcPts val="900"/>
+              </a:spcAft>
+              <a:buNone/>
+            </a:pPr>
+            <a:r>
+              <a:rPr lang="en-US" sz="1350" i="1" dirty="0">
+                <a:solidFill>
+                  <a:srgbClr val="9A9A9A"/>
+                </a:solidFill>
+                <a:latin typeface="Arial" pitchFamily="34" charset="0"/>
+                <a:ea typeface="Arial" pitchFamily="34" charset="-122"/>
+                <a:cs typeface="Arial" pitchFamily="34" charset="-120"/>
+              </a:rPr>
+              <a:t>(bulleted, no cents, labeled)</a:t>
+            </a:r>
+            <a:endParaRPr lang="en-US" sz="1350" dirty="0"/>
+          </a:p>
+        </p:txBody>
+      </p:sp>
+      <p:sp>
+        <p:nvSpPr>
+          <p:cNvPr id="11" name="Text 9"/>
+          <p:cNvSpPr/>
+          <p:nvPr/>
+        </p:nvSpPr>
+        <p:spPr>
+          <a:xfrm>
+            <a:off x="548640" y="5394960"/>
+            <a:ext cx="7315200" cy="365760"/>
+          </a:xfrm>
+          <a:prstGeom prst="rect">
+            <a:avLst/>
+          </a:prstGeom>
+          <a:noFill/>
+          <a:ln/>
+        </p:spPr>
+        <p:txBody>
+          <a:bodyPr wrap="square" rtlCol="0" anchor="ctr"/>
+          <a:lstStyle/>
+          <a:p>
+            <a:pPr marL="0" indent="0">
+              <a:buNone/>
+            </a:pPr>
+            <a:r>
+              <a:rPr lang="en-US" sz="1400" b="1" dirty="0">
+                <a:solidFill>
+                  <a:srgbClr val="CF3338"/>
+                </a:solidFill>
+                <a:latin typeface="Arial" pitchFamily="34" charset="0"/>
+                <a:ea typeface="Arial" pitchFamily="34" charset="-122"/>
+                <a:cs typeface="Arial" pitchFamily="34" charset="-120"/>
+              </a:rPr>
+              <a:t>Worksheet:  </a:t>
+            </a:r>
+            <a:r>
+              <a:rPr lang="en-US" sz="1400" dirty="0">
+                <a:solidFill>
+                  <a:srgbClr val="1F2120"/>
+                </a:solidFill>
+                <a:latin typeface="Courier New" pitchFamily="34" charset="0"/>
+                <a:ea typeface="Courier New" pitchFamily="34" charset="-122"/>
+                <a:cs typeface="Courier New" pitchFamily="34" charset="-120"/>
+              </a:rPr>
+              <a:t>RegionalSummary  (data-start.xlsx) · Copilot chat</a:t>
+            </a:r>
+            <a:endParaRPr lang="en-US" sz="1400" dirty="0"/>
+          </a:p>
+        </p:txBody>
+      </p:sp>
+      <p:sp>
+        <p:nvSpPr>
+          <p:cNvPr id="12" name="Text 10"/>
+          <p:cNvSpPr/>
+          <p:nvPr/>
+        </p:nvSpPr>
+        <p:spPr>
+          <a:xfrm>
+            <a:off x="548640" y="5779008"/>
+            <a:ext cx="11064240" cy="548640"/>
+          </a:xfrm>
+          <a:prstGeom prst="rect">
+            <a:avLst/>
+          </a:prstGeom>
+          <a:noFill/>
+          <a:ln/>
+        </p:spPr>
+        <p:txBody>
+          <a:bodyPr wrap="square" rtlCol="0" anchor="ctr"/>
+          <a:lstStyle/>
+          <a:p>
+            <a:pPr marL="0" indent="0">
+              <a:buNone/>
+            </a:pPr>
+            <a:r>
+              <a:rPr lang="en-US" sz="1250" i="1" dirty="0">
+                <a:solidFill>
+                  <a:srgbClr val="606060"/>
+                </a:solidFill>
+                <a:latin typeface="Arial" pitchFamily="34" charset="0"/>
+                <a:ea typeface="Arial" pitchFamily="34" charset="-122"/>
+                <a:cs typeface="Arial" pitchFamily="34" charset="-120"/>
+              </a:rPr>
+              <a:t>A different dataset on purpose. Same prompt, same data. Only the standing instruction changed.</a:t>
+            </a:r>
+            <a:endParaRPr lang="en-US" sz="1250" dirty="0"/>
+          </a:p>
+        </p:txBody>
+      </p:sp>
       <p:pic>
         <p:nvPicPr>
-          <p:cNvPr id="3" name="Image 0" descr="assets/chevron-white.png"/>
+          <p:cNvPr id="13" name="Image 0" descr="assets/chevron-red.png"/>
           <p:cNvPicPr>
             <a:picLocks noChangeAspect="1"/>
           </p:cNvPicPr>
@@ -5398,226 +6037,14 @@
         </p:blipFill>
         <p:spPr>
           <a:xfrm>
-            <a:off x="9966960" y="4892040"/>
-            <a:ext cx="1554480" cy="1783080"/>
+            <a:off x="10744200" y="5074920"/>
+            <a:ext cx="1417320" cy="1627632"/>
           </a:xfrm>
           <a:prstGeom prst="rect">
             <a:avLst/>
           </a:prstGeom>
         </p:spPr>
       </p:pic>
-      <p:sp>
-        <p:nvSpPr>
-          <p:cNvPr id="4" name="Text 1"/>
-          <p:cNvSpPr/>
-          <p:nvPr/>
-        </p:nvSpPr>
-        <p:spPr>
-          <a:xfrm>
-            <a:off x="548640" y="548640"/>
-            <a:ext cx="7315200" cy="1280160"/>
-          </a:xfrm>
-          <a:prstGeom prst="rect">
-            <a:avLst/>
-          </a:prstGeom>
-          <a:noFill/>
-          <a:ln/>
-        </p:spPr>
-        <p:txBody>
-          <a:bodyPr wrap="square" rtlCol="0" anchor="t"/>
-          <a:lstStyle/>
-          <a:p>
-            <a:pPr marL="0" indent="0">
-              <a:buNone/>
-            </a:pPr>
-            <a:r>
-              <a:rPr lang="en-US" sz="3000" b="1" dirty="0">
-                <a:solidFill>
-                  <a:srgbClr val="CF3338"/>
-                </a:solidFill>
-                <a:latin typeface="Arial" pitchFamily="34" charset="0"/>
-                <a:ea typeface="Arial" pitchFamily="34" charset="-122"/>
-                <a:cs typeface="Arial" pitchFamily="34" charset="-120"/>
-              </a:rPr>
-              <a:t>Customize it, live (light)</a:t>
-            </a:r>
-            <a:endParaRPr lang="en-US" sz="3000" dirty="0"/>
-          </a:p>
-        </p:txBody>
-      </p:sp>
-      <p:sp>
-        <p:nvSpPr>
-          <p:cNvPr id="5" name="Text 2"/>
-          <p:cNvSpPr/>
-          <p:nvPr/>
-        </p:nvSpPr>
-        <p:spPr>
-          <a:xfrm>
-            <a:off x="640080" y="1965960"/>
-            <a:ext cx="7223760" cy="3108960"/>
-          </a:xfrm>
-          <a:prstGeom prst="rect">
-            <a:avLst/>
-          </a:prstGeom>
-          <a:noFill/>
-          <a:ln/>
-        </p:spPr>
-        <p:txBody>
-          <a:bodyPr wrap="square" rtlCol="0" anchor="t"/>
-          <a:lstStyle/>
-          <a:p>
-            <a:pPr marL="0" indent="0">
-              <a:lnSpc>
-                <a:spcPct val="105000"/>
-              </a:lnSpc>
-              <a:buNone/>
-            </a:pPr>
-            <a:r>
-              <a:rPr lang="en-US" sz="1800" b="1" dirty="0">
-                <a:solidFill>
-                  <a:srgbClr val="CF3338"/>
-                </a:solidFill>
-                <a:latin typeface="Arial" pitchFamily="34" charset="0"/>
-                <a:ea typeface="Arial" pitchFamily="34" charset="-122"/>
-                <a:cs typeface="Arial" pitchFamily="34" charset="-120"/>
-              </a:rPr>
-              <a:t>1.  </a:t>
-            </a:r>
-            <a:r>
-              <a:rPr lang="en-US" sz="1800" dirty="0">
-                <a:solidFill>
-                  <a:srgbClr val="1F2120"/>
-                </a:solidFill>
-                <a:latin typeface="Arial" pitchFamily="34" charset="0"/>
-                <a:ea typeface="Arial" pitchFamily="34" charset="-122"/>
-                <a:cs typeface="Arial" pitchFamily="34" charset="-120"/>
-              </a:rPr>
-              <a:t>Set one custom instruction, then re-run a summary and watch Copilot follow your format.</a:t>
-            </a:r>
-            <a:endParaRPr lang="en-US" sz="1800" dirty="0"/>
-          </a:p>
-          <a:p>
-            <a:pPr marL="0" indent="0">
-              <a:lnSpc>
-                <a:spcPct val="105000"/>
-              </a:lnSpc>
-              <a:buNone/>
-            </a:pPr>
-            <a:r>
-              <a:rPr lang="en-US" sz="1800" b="1" dirty="0">
-                <a:solidFill>
-                  <a:srgbClr val="CF3338"/>
-                </a:solidFill>
-                <a:latin typeface="Arial" pitchFamily="34" charset="0"/>
-                <a:ea typeface="Arial" pitchFamily="34" charset="-122"/>
-                <a:cs typeface="Arial" pitchFamily="34" charset="-120"/>
-              </a:rPr>
-              <a:t>2.  </a:t>
-            </a:r>
-            <a:r>
-              <a:rPr lang="en-US" sz="1800" dirty="0">
-                <a:solidFill>
-                  <a:srgbClr val="1F2120"/>
-                </a:solidFill>
-                <a:latin typeface="Arial" pitchFamily="34" charset="0"/>
-                <a:ea typeface="Arial" pitchFamily="34" charset="-122"/>
-                <a:cs typeface="Arial" pitchFamily="34" charset="-120"/>
-              </a:rPr>
-              <a:t>Save your data-quality prompt as a reusable Skill you can call by name next month.</a:t>
-            </a:r>
-            <a:endParaRPr lang="en-US" sz="1800" dirty="0"/>
-          </a:p>
-        </p:txBody>
-      </p:sp>
-      <p:sp>
-        <p:nvSpPr>
-          <p:cNvPr id="6" name="Text 3"/>
-          <p:cNvSpPr/>
-          <p:nvPr/>
-        </p:nvSpPr>
-        <p:spPr>
-          <a:xfrm>
-            <a:off x="640080" y="5394960"/>
-            <a:ext cx="7315200" cy="365760"/>
-          </a:xfrm>
-          <a:prstGeom prst="rect">
-            <a:avLst/>
-          </a:prstGeom>
-          <a:noFill/>
-          <a:ln/>
-        </p:spPr>
-        <p:txBody>
-          <a:bodyPr wrap="square" rtlCol="0" anchor="ctr"/>
-          <a:lstStyle/>
-          <a:p>
-            <a:pPr marL="0" indent="0">
-              <a:buNone/>
-            </a:pPr>
-            <a:r>
-              <a:rPr lang="en-US" sz="1500" b="1" dirty="0">
-                <a:solidFill>
-                  <a:srgbClr val="CF3338"/>
-                </a:solidFill>
-                <a:latin typeface="Arial" pitchFamily="34" charset="0"/>
-                <a:ea typeface="Arial" pitchFamily="34" charset="-122"/>
-                <a:cs typeface="Arial" pitchFamily="34" charset="-120"/>
-              </a:rPr>
-              <a:t>Worksheet:  </a:t>
-            </a:r>
-            <a:r>
-              <a:rPr lang="en-US" sz="1500" dirty="0">
-                <a:solidFill>
-                  <a:srgbClr val="1F2120"/>
-                </a:solidFill>
-                <a:latin typeface="Courier New" pitchFamily="34" charset="0"/>
-                <a:ea typeface="Courier New" pitchFamily="34" charset="-122"/>
-                <a:cs typeface="Courier New" pitchFamily="34" charset="-120"/>
-              </a:rPr>
-              <a:t>InvoiceRegister</a:t>
-            </a:r>
-            <a:endParaRPr lang="en-US" sz="1500" dirty="0"/>
-          </a:p>
-        </p:txBody>
-      </p:sp>
-      <p:sp>
-        <p:nvSpPr>
-          <p:cNvPr id="7" name="Text 4"/>
-          <p:cNvSpPr/>
-          <p:nvPr/>
-        </p:nvSpPr>
-        <p:spPr>
-          <a:xfrm>
-            <a:off x="640080" y="5806440"/>
-            <a:ext cx="7315200" cy="640080"/>
-          </a:xfrm>
-          <a:prstGeom prst="rect">
-            <a:avLst/>
-          </a:prstGeom>
-          <a:noFill/>
-          <a:ln/>
-        </p:spPr>
-        <p:txBody>
-          <a:bodyPr wrap="square" rtlCol="0" anchor="ctr"/>
-          <a:lstStyle/>
-          <a:p>
-            <a:pPr marL="0" indent="0">
-              <a:buNone/>
-            </a:pPr>
-            <a:r>
-              <a:rPr lang="en-US" sz="1250" i="1" dirty="0">
-                <a:solidFill>
-                  <a:srgbClr val="606060"/>
-                </a:solidFill>
-                <a:latin typeface="Arial" pitchFamily="34" charset="0"/>
-                <a:ea typeface="Arial" pitchFamily="34" charset="-122"/>
-                <a:cs typeface="Arial" pitchFamily="34" charset="-120"/>
-              </a:rPr>
-              <a:t>All three need a Microsoft 365 Copilot license and are rolling out through 2026. Keep this demo short.</a:t>
-            </a:r>
-            <a:endParaRPr lang="en-US" sz="1250" dirty="0"/>
-          </a:p>
-        </p:txBody>
-      </p:sp>
     </p:spTree>
   </p:cSld>
   <p:clrMapOvr>
@@ -5659,8 +6086,8 @@
         </p:nvSpPr>
         <p:spPr>
           <a:xfrm>
-            <a:off x="548640" y="502920"/>
-            <a:ext cx="10058400" cy="914400"/>
+            <a:off x="548640" y="457200"/>
+            <a:ext cx="11247120" cy="914400"/>
           </a:xfrm>
           <a:prstGeom prst="rect">
             <a:avLst/>
@@ -5676,7 +6103,7 @@
               <a:buNone/>
             </a:pPr>
             <a:r>
-              <a:rPr lang="en-US" sz="3200" b="1" dirty="0">
+              <a:rPr lang="en-US" sz="2800" b="1" dirty="0">
                 <a:solidFill>
                   <a:srgbClr val="1F2120"/>
                 </a:solidFill>
@@ -5684,9 +6111,9 @@
                 <a:ea typeface="Arial" pitchFamily="34" charset="-122"/>
                 <a:cs typeface="Arial" pitchFamily="34" charset="-120"/>
               </a:rPr>
-              <a:t>If you want to go further</a:t>
-            </a:r>
-            <a:endParaRPr lang="en-US" sz="3200" dirty="0"/>
+              <a:t>A reference file changes the answer itself</a:t>
+            </a:r>
+            <a:endParaRPr lang="en-US" sz="2800" dirty="0"/>
           </a:p>
         </p:txBody>
       </p:sp>
@@ -5698,14 +6125,16 @@
         </p:nvSpPr>
         <p:spPr>
           <a:xfrm>
-            <a:off x="640080" y="1828800"/>
-            <a:ext cx="164592" cy="777240"/>
-          </a:xfrm>
-          <a:prstGeom prst="rect">
-            <a:avLst/>
+            <a:off x="548640" y="1261872"/>
+            <a:ext cx="11091672" cy="841248"/>
+          </a:xfrm>
+          <a:prstGeom prst="roundRect">
+            <a:avLst>
+              <a:gd name="adj" fmla="val 7609"/>
+            </a:avLst>
           </a:prstGeom>
           <a:solidFill>
-            <a:srgbClr val="CF3338"/>
+            <a:srgbClr val="F3E6E6"/>
           </a:solidFill>
           <a:ln w="12700">
             <a:solidFill>
@@ -5730,17 +6159,17 @@
         </p:nvSpPr>
         <p:spPr>
           <a:xfrm>
-            <a:off x="960120" y="1783080"/>
-            <a:ext cx="9692640" cy="868680"/>
-          </a:xfrm>
-          <a:prstGeom prst="rect">
-            <a:avLst/>
-          </a:prstGeom>
-          <a:noFill/>
-          <a:ln/>
-        </p:spPr>
-        <p:txBody>
-          <a:bodyPr wrap="square" rtlCol="0" anchor="t"/>
+            <a:off x="777240" y="1335024"/>
+            <a:ext cx="10607040" cy="694944"/>
+          </a:xfrm>
+          <a:prstGeom prst="rect">
+            <a:avLst/>
+          </a:prstGeom>
+          <a:noFill/>
+          <a:ln/>
+        </p:spPr>
+        <p:txBody>
+          <a:bodyPr wrap="square" rtlCol="0" anchor="ctr"/>
           <a:lstStyle/>
           <a:p>
             <a:pPr marL="0" indent="0">
@@ -5750,7 +6179,18 @@
               <a:buNone/>
             </a:pPr>
             <a:r>
-              <a:rPr lang="en-US" sz="1700" b="1" dirty="0">
+              <a:rPr lang="en-US" sz="1300" b="1" dirty="0">
+                <a:solidFill>
+                  <a:srgbClr val="CF3338"/>
+                </a:solidFill>
+                <a:latin typeface="Arial" pitchFamily="34" charset="0"/>
+                <a:ea typeface="Arial" pitchFamily="34" charset="-122"/>
+                <a:cs typeface="Arial" pitchFamily="34" charset="-120"/>
+              </a:rPr>
+              <a:t>Attach (Copilot chat):  </a:t>
+            </a:r>
+            <a:r>
+              <a:rPr lang="en-US" sz="1300" i="1" dirty="0">
                 <a:solidFill>
                   <a:srgbClr val="1F2120"/>
                 </a:solidFill>
@@ -5758,20 +6198,9 @@
                 <a:ea typeface="Arial" pitchFamily="34" charset="-122"/>
                 <a:cs typeface="Arial" pitchFamily="34" charset="-120"/>
               </a:rPr>
-              <a:t>Python in Excel   </a:t>
-            </a:r>
-            <a:r>
-              <a:rPr lang="en-US" sz="1450" dirty="0">
-                <a:solidFill>
-                  <a:srgbClr val="606060"/>
-                </a:solidFill>
-                <a:latin typeface="Arial" pitchFamily="34" charset="0"/>
-                <a:ea typeface="Arial" pitchFamily="34" charset="-122"/>
-                <a:cs typeface="Arial" pitchFamily="34" charset="-120"/>
-              </a:rPr>
-              <a:t>Forecasting and simulation, written for you by Copilot and run right in the grid.</a:t>
-            </a:r>
-            <a:endParaRPr lang="en-US" sz="1700" dirty="0"/>
+              <a:t>Reporting &amp; Chart Style Guide.docx via the file picker, then ask Copilot to summarize and chart RegionalSummary.</a:t>
+            </a:r>
+            <a:endParaRPr lang="en-US" sz="1300" dirty="0"/>
           </a:p>
         </p:txBody>
       </p:sp>
@@ -5783,18 +6212,20 @@
         </p:nvSpPr>
         <p:spPr>
           <a:xfrm>
-            <a:off x="640080" y="2761488"/>
-            <a:ext cx="164592" cy="777240"/>
-          </a:xfrm>
-          <a:prstGeom prst="rect">
-            <a:avLst/>
+            <a:off x="548640" y="2377440"/>
+            <a:ext cx="5257800" cy="2880360"/>
+          </a:xfrm>
+          <a:prstGeom prst="roundRect">
+            <a:avLst>
+              <a:gd name="adj" fmla="val 2857"/>
+            </a:avLst>
           </a:prstGeom>
           <a:solidFill>
-            <a:srgbClr val="CF3338"/>
+            <a:srgbClr val="FFFFFF"/>
           </a:solidFill>
           <a:ln w="12700">
             <a:solidFill>
-              <a:srgbClr val="CF3338"/>
+              <a:srgbClr val="D8D5C8"/>
             </a:solidFill>
             <a:prstDash val="solid"/>
           </a:ln>
@@ -5815,8 +6246,47 @@
         </p:nvSpPr>
         <p:spPr>
           <a:xfrm>
-            <a:off x="960120" y="2715768"/>
-            <a:ext cx="9692640" cy="868680"/>
+            <a:off x="841248" y="2505456"/>
+            <a:ext cx="4663440" cy="384048"/>
+          </a:xfrm>
+          <a:prstGeom prst="rect">
+            <a:avLst/>
+          </a:prstGeom>
+          <a:noFill/>
+          <a:ln/>
+        </p:spPr>
+        <p:txBody>
+          <a:bodyPr wrap="square" rtlCol="0" anchor="ctr"/>
+          <a:lstStyle/>
+          <a:p>
+            <a:pPr marL="0" indent="0">
+              <a:buNone/>
+            </a:pPr>
+            <a:r>
+              <a:rPr lang="en-US" sz="1600" b="1" dirty="0">
+                <a:solidFill>
+                  <a:srgbClr val="8A8A8A"/>
+                </a:solidFill>
+                <a:latin typeface="Arial" pitchFamily="34" charset="0"/>
+                <a:ea typeface="Arial" pitchFamily="34" charset="-122"/>
+                <a:cs typeface="Arial" pitchFamily="34" charset="-120"/>
+              </a:rPr>
+              <a:t>Before</a:t>
+            </a:r>
+            <a:endParaRPr lang="en-US" sz="1600" dirty="0"/>
+          </a:p>
+        </p:txBody>
+      </p:sp>
+      <p:sp>
+        <p:nvSpPr>
+          <p:cNvPr id="7" name="Text 5"/>
+          <p:cNvSpPr/>
+          <p:nvPr/>
+        </p:nvSpPr>
+        <p:spPr>
+          <a:xfrm>
+            <a:off x="914400" y="2944368"/>
+            <a:ext cx="4572000" cy="2240280"/>
           </a:xfrm>
           <a:prstGeom prst="rect">
             <a:avLst/>
@@ -5830,12 +6300,12 @@
           <a:p>
             <a:pPr marL="0" indent="0">
               <a:lnSpc>
-                <a:spcPct val="100000"/>
+                <a:spcPct val="105000"/>
               </a:lnSpc>
               <a:buNone/>
             </a:pPr>
             <a:r>
-              <a:rPr lang="en-US" sz="1700" b="1" dirty="0">
+              <a:rPr lang="en-US" sz="1350" b="1" dirty="0">
                 <a:solidFill>
                   <a:srgbClr val="1F2120"/>
                 </a:solidFill>
@@ -5843,10 +6313,10 @@
                 <a:ea typeface="Arial" pitchFamily="34" charset="-122"/>
                 <a:cs typeface="Arial" pitchFamily="34" charset="-120"/>
               </a:rPr>
-              <a:t>Analyst Agent   </a:t>
-            </a:r>
-            <a:r>
-              <a:rPr lang="en-US" sz="1450" dirty="0">
+              <a:t>Summary:</a:t>
+            </a:r>
+            <a:r>
+              <a:rPr lang="en-US" sz="1350" dirty="0">
                 <a:solidFill>
                   <a:srgbClr val="606060"/>
                 </a:solidFill>
@@ -5854,32 +6324,88 @@
                 <a:ea typeface="Arial" pitchFamily="34" charset="-122"/>
                 <a:cs typeface="Arial" pitchFamily="34" charset="-120"/>
               </a:rPr>
-              <a:t>Scenario analysis and exception review that shows its work step by step.</a:t>
-            </a:r>
-            <a:endParaRPr lang="en-US" sz="1700" dirty="0"/>
-          </a:p>
-        </p:txBody>
-      </p:sp>
-      <p:sp>
-        <p:nvSpPr>
-          <p:cNvPr id="7" name="Shape 5"/>
-          <p:cNvSpPr/>
-          <p:nvPr/>
-        </p:nvSpPr>
-        <p:spPr>
-          <a:xfrm>
-            <a:off x="640080" y="3694176"/>
-            <a:ext cx="164592" cy="777240"/>
-          </a:xfrm>
-          <a:prstGeom prst="rect">
-            <a:avLst/>
+              <a:t>  a generic paragraph, mixed formats</a:t>
+            </a:r>
+            <a:endParaRPr lang="en-US" sz="1350" dirty="0"/>
+          </a:p>
+          <a:p>
+            <a:pPr marL="0" indent="0">
+              <a:lnSpc>
+                <a:spcPct val="105000"/>
+              </a:lnSpc>
+              <a:buNone/>
+            </a:pPr>
+            <a:r>
+              <a:rPr lang="en-US" sz="1350" b="1" dirty="0">
+                <a:solidFill>
+                  <a:srgbClr val="1F2120"/>
+                </a:solidFill>
+                <a:latin typeface="Arial" pitchFamily="34" charset="0"/>
+                <a:ea typeface="Arial" pitchFamily="34" charset="-122"/>
+                <a:cs typeface="Arial" pitchFamily="34" charset="-120"/>
+              </a:rPr>
+              <a:t>Chart:</a:t>
+            </a:r>
+            <a:r>
+              <a:rPr lang="en-US" sz="1350" dirty="0">
+                <a:solidFill>
+                  <a:srgbClr val="606060"/>
+                </a:solidFill>
+                <a:latin typeface="Arial" pitchFamily="34" charset="0"/>
+                <a:ea typeface="Arial" pitchFamily="34" charset="-122"/>
+                <a:cs typeface="Arial" pitchFamily="34" charset="-120"/>
+              </a:rPr>
+              <a:t>  default blue columns, unsorted</a:t>
+            </a:r>
+            <a:endParaRPr lang="en-US" sz="1350" dirty="0"/>
+          </a:p>
+          <a:p>
+            <a:pPr marL="0" indent="0">
+              <a:lnSpc>
+                <a:spcPct val="105000"/>
+              </a:lnSpc>
+              <a:spcAft>
+                <a:spcPts val="900"/>
+              </a:spcAft>
+              <a:buNone/>
+            </a:pPr>
+            <a:r>
+              <a:rPr lang="en-US" sz="1350" i="1" dirty="0">
+                <a:solidFill>
+                  <a:srgbClr val="9A9A9A"/>
+                </a:solidFill>
+                <a:latin typeface="Arial" pitchFamily="34" charset="0"/>
+                <a:ea typeface="Arial" pitchFamily="34" charset="-122"/>
+                <a:cs typeface="Arial" pitchFamily="34" charset="-120"/>
+              </a:rPr>
+              <a:t>(follows no house rules)</a:t>
+            </a:r>
+            <a:endParaRPr lang="en-US" sz="1350" dirty="0"/>
+          </a:p>
+        </p:txBody>
+      </p:sp>
+      <p:sp>
+        <p:nvSpPr>
+          <p:cNvPr id="8" name="Shape 6"/>
+          <p:cNvSpPr/>
+          <p:nvPr/>
+        </p:nvSpPr>
+        <p:spPr>
+          <a:xfrm>
+            <a:off x="6355080" y="2377440"/>
+            <a:ext cx="5257800" cy="2880360"/>
+          </a:xfrm>
+          <a:prstGeom prst="roundRect">
+            <a:avLst>
+              <a:gd name="adj" fmla="val 2857"/>
+            </a:avLst>
           </a:prstGeom>
           <a:solidFill>
-            <a:srgbClr val="CF3338"/>
+            <a:srgbClr val="FFFFFF"/>
           </a:solidFill>
           <a:ln w="12700">
             <a:solidFill>
-              <a:srgbClr val="CF3338"/>
+              <a:srgbClr val="D8D5C8"/>
             </a:solidFill>
             <a:prstDash val="solid"/>
           </a:ln>
@@ -5894,14 +6420,53 @@
       </p:sp>
       <p:sp>
         <p:nvSpPr>
-          <p:cNvPr id="8" name="Text 6"/>
-          <p:cNvSpPr/>
-          <p:nvPr/>
-        </p:nvSpPr>
-        <p:spPr>
-          <a:xfrm>
-            <a:off x="960120" y="3648456"/>
-            <a:ext cx="9692640" cy="868680"/>
+          <p:cNvPr id="9" name="Text 7"/>
+          <p:cNvSpPr/>
+          <p:nvPr/>
+        </p:nvSpPr>
+        <p:spPr>
+          <a:xfrm>
+            <a:off x="6647688" y="2505456"/>
+            <a:ext cx="4663440" cy="384048"/>
+          </a:xfrm>
+          <a:prstGeom prst="rect">
+            <a:avLst/>
+          </a:prstGeom>
+          <a:noFill/>
+          <a:ln/>
+        </p:spPr>
+        <p:txBody>
+          <a:bodyPr wrap="square" rtlCol="0" anchor="ctr"/>
+          <a:lstStyle/>
+          <a:p>
+            <a:pPr marL="0" indent="0">
+              <a:buNone/>
+            </a:pPr>
+            <a:r>
+              <a:rPr lang="en-US" sz="1600" b="1" dirty="0">
+                <a:solidFill>
+                  <a:srgbClr val="CF3338"/>
+                </a:solidFill>
+                <a:latin typeface="Arial" pitchFamily="34" charset="0"/>
+                <a:ea typeface="Arial" pitchFamily="34" charset="-122"/>
+                <a:cs typeface="Arial" pitchFamily="34" charset="-120"/>
+              </a:rPr>
+              <a:t>After</a:t>
+            </a:r>
+            <a:endParaRPr lang="en-US" sz="1600" dirty="0"/>
+          </a:p>
+        </p:txBody>
+      </p:sp>
+      <p:sp>
+        <p:nvSpPr>
+          <p:cNvPr id="10" name="Text 8"/>
+          <p:cNvSpPr/>
+          <p:nvPr/>
+        </p:nvSpPr>
+        <p:spPr>
+          <a:xfrm>
+            <a:off x="6720840" y="2944368"/>
+            <a:ext cx="4572000" cy="2240280"/>
           </a:xfrm>
           <a:prstGeom prst="rect">
             <a:avLst/>
@@ -5915,12 +6480,12 @@
           <a:p>
             <a:pPr marL="0" indent="0">
               <a:lnSpc>
-                <a:spcPct val="100000"/>
+                <a:spcPct val="105000"/>
               </a:lnSpc>
               <a:buNone/>
             </a:pPr>
             <a:r>
-              <a:rPr lang="en-US" sz="1700" b="1" dirty="0">
+              <a:rPr lang="en-US" sz="1350" b="1" dirty="0">
                 <a:solidFill>
                   <a:srgbClr val="1F2120"/>
                 </a:solidFill>
@@ -5928,10 +6493,10 @@
                 <a:ea typeface="Arial" pitchFamily="34" charset="-122"/>
                 <a:cs typeface="Arial" pitchFamily="34" charset="-120"/>
               </a:rPr>
-              <a:t>Agent Mode   </a:t>
-            </a:r>
-            <a:r>
-              <a:rPr lang="en-US" sz="1450" dirty="0">
+              <a:t>Summary:</a:t>
+            </a:r>
+            <a:r>
+              <a:rPr lang="en-US" sz="1350" dirty="0">
                 <a:solidFill>
                   <a:srgbClr val="606060"/>
                 </a:solidFill>
@@ -5939,73 +6504,19 @@
                 <a:ea typeface="Arial" pitchFamily="34" charset="-122"/>
                 <a:cs typeface="Arial" pitchFamily="34" charset="-120"/>
               </a:rPr>
-              <a:t>A coordinated first draft across sheets: analysis, a chart, and a written summary.</a:t>
-            </a:r>
-            <a:endParaRPr lang="en-US" sz="1700" dirty="0"/>
-          </a:p>
-        </p:txBody>
-      </p:sp>
-      <p:sp>
-        <p:nvSpPr>
-          <p:cNvPr id="9" name="Shape 7"/>
-          <p:cNvSpPr/>
-          <p:nvPr/>
-        </p:nvSpPr>
-        <p:spPr>
-          <a:xfrm>
-            <a:off x="640080" y="4626864"/>
-            <a:ext cx="164592" cy="777240"/>
-          </a:xfrm>
-          <a:prstGeom prst="rect">
-            <a:avLst/>
-          </a:prstGeom>
-          <a:solidFill>
-            <a:srgbClr val="CF3338"/>
-          </a:solidFill>
-          <a:ln w="12700">
-            <a:solidFill>
-              <a:srgbClr val="CF3338"/>
-            </a:solidFill>
-            <a:prstDash val="solid"/>
-          </a:ln>
-        </p:spPr>
-        <p:txBody>
-          <a:bodyPr/>
-          <a:lstStyle/>
-          <a:p>
-            <a:endParaRPr lang="en-US"/>
-          </a:p>
-        </p:txBody>
-      </p:sp>
-      <p:sp>
-        <p:nvSpPr>
-          <p:cNvPr id="10" name="Text 8"/>
-          <p:cNvSpPr/>
-          <p:nvPr/>
-        </p:nvSpPr>
-        <p:spPr>
-          <a:xfrm>
-            <a:off x="960120" y="4581144"/>
-            <a:ext cx="9692640" cy="868680"/>
-          </a:xfrm>
-          <a:prstGeom prst="rect">
-            <a:avLst/>
-          </a:prstGeom>
-          <a:noFill/>
-          <a:ln/>
-        </p:spPr>
-        <p:txBody>
-          <a:bodyPr wrap="square" rtlCol="0" anchor="t"/>
-          <a:lstStyle/>
+              <a:t>  3 number-first bullets, Growth or Decline</a:t>
+            </a:r>
+            <a:endParaRPr lang="en-US" sz="1350" dirty="0"/>
+          </a:p>
           <a:p>
             <a:pPr marL="0" indent="0">
               <a:lnSpc>
-                <a:spcPct val="100000"/>
+                <a:spcPct val="105000"/>
               </a:lnSpc>
               <a:buNone/>
             </a:pPr>
             <a:r>
-              <a:rPr lang="en-US" sz="1700" b="1" dirty="0">
+              <a:rPr lang="en-US" sz="1350" b="1" dirty="0">
                 <a:solidFill>
                   <a:srgbClr val="1F2120"/>
                 </a:solidFill>
@@ -6013,10 +6524,10 @@
                 <a:ea typeface="Arial" pitchFamily="34" charset="-122"/>
                 <a:cs typeface="Arial" pitchFamily="34" charset="-120"/>
               </a:rPr>
-              <a:t>Workbook Rules (.Rules)   </a:t>
-            </a:r>
-            <a:r>
-              <a:rPr lang="en-US" sz="1450" dirty="0">
+              <a:t>Chart:</a:t>
+            </a:r>
+            <a:r>
+              <a:rPr lang="en-US" sz="1350" dirty="0">
                 <a:solidFill>
                   <a:srgbClr val="606060"/>
                 </a:solidFill>
@@ -6024,9 +6535,32 @@
                 <a:ea typeface="Arial" pitchFamily="34" charset="-122"/>
                 <a:cs typeface="Arial" pitchFamily="34" charset="-120"/>
               </a:rPr>
-              <a:t>Bake your team’s standards into a file so every Copilot edit follows them.</a:t>
-            </a:r>
-            <a:endParaRPr lang="en-US" sz="1700" dirty="0"/>
+              <a:t>  brand red, sorted high to low, labels</a:t>
+            </a:r>
+            <a:endParaRPr lang="en-US" sz="1350" dirty="0"/>
+          </a:p>
+          <a:p>
+            <a:pPr marL="0" indent="0">
+              <a:lnSpc>
+                <a:spcPct val="105000"/>
+              </a:lnSpc>
+              <a:spcAft>
+                <a:spcPts val="900"/>
+              </a:spcAft>
+              <a:buNone/>
+            </a:pPr>
+            <a:r>
+              <a:rPr lang="en-US" sz="1350" i="1" dirty="0">
+                <a:solidFill>
+                  <a:srgbClr val="9A9A9A"/>
+                </a:solidFill>
+                <a:latin typeface="Arial" pitchFamily="34" charset="0"/>
+                <a:ea typeface="Arial" pitchFamily="34" charset="-122"/>
+                <a:cs typeface="Arial" pitchFamily="34" charset="-120"/>
+              </a:rPr>
+              <a:t>(follows your style guide)</a:t>
+            </a:r>
+            <a:endParaRPr lang="en-US" sz="1350" dirty="0"/>
           </a:p>
         </p:txBody>
       </p:sp>
@@ -6038,8 +6572,8 @@
         </p:nvSpPr>
         <p:spPr>
           <a:xfrm>
-            <a:off x="640080" y="5715000"/>
-            <a:ext cx="10058400" cy="365760"/>
+            <a:off x="548640" y="5394960"/>
+            <a:ext cx="7315200" cy="365760"/>
           </a:xfrm>
           <a:prstGeom prst="rect">
             <a:avLst/>
@@ -6055,7 +6589,57 @@
               <a:buNone/>
             </a:pPr>
             <a:r>
-              <a:rPr lang="en-US" sz="1300" i="1" dirty="0">
+              <a:rPr lang="en-US" sz="1400" b="1" dirty="0">
+                <a:solidFill>
+                  <a:srgbClr val="CF3338"/>
+                </a:solidFill>
+                <a:latin typeface="Arial" pitchFamily="34" charset="0"/>
+                <a:ea typeface="Arial" pitchFamily="34" charset="-122"/>
+                <a:cs typeface="Arial" pitchFamily="34" charset="-120"/>
+              </a:rPr>
+              <a:t>Worksheet:  </a:t>
+            </a:r>
+            <a:r>
+              <a:rPr lang="en-US" sz="1400" dirty="0">
+                <a:solidFill>
+                  <a:srgbClr val="1F2120"/>
+                </a:solidFill>
+                <a:latin typeface="Courier New" pitchFamily="34" charset="0"/>
+                <a:ea typeface="Courier New" pitchFamily="34" charset="-122"/>
+                <a:cs typeface="Courier New" pitchFamily="34" charset="-120"/>
+              </a:rPr>
+              <a:t>RegionalSummary  (data-start.xlsx) · Copilot chat</a:t>
+            </a:r>
+            <a:endParaRPr lang="en-US" sz="1400" dirty="0"/>
+          </a:p>
+        </p:txBody>
+      </p:sp>
+      <p:sp>
+        <p:nvSpPr>
+          <p:cNvPr id="12" name="Text 10"/>
+          <p:cNvSpPr/>
+          <p:nvPr/>
+        </p:nvSpPr>
+        <p:spPr>
+          <a:xfrm>
+            <a:off x="548640" y="5779008"/>
+            <a:ext cx="11064240" cy="548640"/>
+          </a:xfrm>
+          <a:prstGeom prst="rect">
+            <a:avLst/>
+          </a:prstGeom>
+          <a:noFill/>
+          <a:ln/>
+        </p:spPr>
+        <p:txBody>
+          <a:bodyPr wrap="square" rtlCol="0" anchor="ctr"/>
+          <a:lstStyle/>
+          <a:p>
+            <a:pPr marL="0" indent="0">
+              <a:buNone/>
+            </a:pPr>
+            <a:r>
+              <a:rPr lang="en-US" sz="1250" i="1" dirty="0">
                 <a:solidFill>
                   <a:srgbClr val="606060"/>
                 </a:solidFill>
@@ -6063,15 +6647,15 @@
                 <a:ea typeface="Arial" pitchFamily="34" charset="-122"/>
                 <a:cs typeface="Arial" pitchFamily="34" charset="-120"/>
               </a:rPr>
-              <a:t>Pick whichever the room is asking about. Each one is a session on its own.</a:t>
-            </a:r>
-            <a:endParaRPr lang="en-US" sz="1300" dirty="0"/>
+              <a:t>A policy, a codebook, or a style guide: give Copilot the document with your rules, and its output follows them.</a:t>
+            </a:r>
+            <a:endParaRPr lang="en-US" sz="1250" dirty="0"/>
           </a:p>
         </p:txBody>
       </p:sp>
       <p:pic>
         <p:nvPicPr>
-          <p:cNvPr id="12" name="Image 0" descr="assets/chevron-red.png"/>
+          <p:cNvPr id="13" name="Image 0" descr="assets/chevron-red.png"/>
           <p:cNvPicPr>
             <a:picLocks noChangeAspect="1"/>
           </p:cNvPicPr>
@@ -6103,7 +6687,7 @@
 
 <file path=ppt/slides/slide19.xml><?xml version="1.0" encoding="utf-8"?>
 <p:sld xmlns:a="http://schemas.openxmlformats.org/drawingml/2006/main" xmlns:r="http://schemas.openxmlformats.org/officeDocument/2006/relationships" xmlns:p="http://schemas.openxmlformats.org/presentationml/2006/main">
-  <p:cSld name="Slide 19">
+  <p:cSld name="Slide 20">
     <p:bg>
       <p:bgPr>
         <a:solidFill>
@@ -6126,6 +6710,30 @@
           <a:chExt cx="0" cy="0"/>
         </a:xfrm>
       </p:grpSpPr>
+      <p:pic>
+        <p:nvPicPr>
+          <p:cNvPr id="2" name="Image 0" descr="assets/sf-dark.png"/>
+          <p:cNvPicPr>
+            <a:picLocks noChangeAspect="1"/>
+          </p:cNvPicPr>
+          <p:nvPr/>
+        </p:nvPicPr>
+        <p:blipFill>
+          <a:blip r:embed="rId3"/>
+          <a:stretch>
+            <a:fillRect/>
+          </a:stretch>
+        </p:blipFill>
+        <p:spPr>
+          <a:xfrm>
+            <a:off x="548640" y="548640"/>
+            <a:ext cx="3291840" cy="451714"/>
+          </a:xfrm>
+          <a:prstGeom prst="rect">
+            <a:avLst/>
+          </a:prstGeom>
+        </p:spPr>
+      </p:pic>
       <p:sp>
         <p:nvSpPr>
           <p:cNvPr id="3" name="Text 0"/>
@@ -6256,7 +6864,7 @@
           <p:nvPr/>
         </p:nvPicPr>
         <p:blipFill>
-          <a:blip r:embed="rId3"/>
+          <a:blip r:embed="rId4"/>
           <a:stretch>
             <a:fillRect/>
           </a:stretch>
@@ -6529,49 +7137,50 @@
       </p:pic>
       <p:pic>
         <p:nvPicPr>
-          <p:cNvPr id="1026" name="Picture 2" descr="Global Excel Summit (9-11 February 2022) - Microsoft Excel Conference">
-            <a:extLst>
-              <a:ext uri="{FF2B5EF4-FFF2-40B4-BE49-F238E27FC236}">
-                <a16:creationId xmlns:a16="http://schemas.microsoft.com/office/drawing/2014/main" id="{4F900C61-96AC-6AAE-D808-F396A32E31AA}"/>
-              </a:ext>
-            </a:extLst>
-          </p:cNvPr>
+          <p:cNvPr id="8" name="Image 4" descr="assets/globalexcel.png"/>
           <p:cNvPicPr>
-            <a:picLocks noChangeAspect="1" noChangeArrowheads="1"/>
+            <a:picLocks noChangeAspect="1"/>
           </p:cNvPicPr>
           <p:nvPr/>
         </p:nvPicPr>
         <p:blipFill>
-          <a:blip r:embed="rId7">
-            <a:extLst>
-              <a:ext uri="{28A0092B-C50C-407E-A947-70E740481C1C}">
-                <a14:useLocalDpi xmlns:a14="http://schemas.microsoft.com/office/drawing/2010/main" val="0"/>
-              </a:ext>
-            </a:extLst>
-          </a:blip>
-          <a:srcRect/>
+          <a:blip r:embed="rId7"/>
           <a:stretch>
             <a:fillRect/>
           </a:stretch>
         </p:blipFill>
-        <p:spPr bwMode="auto">
-          <a:xfrm>
-            <a:off x="4514850" y="4404131"/>
-            <a:ext cx="1581150" cy="1581150"/>
-          </a:xfrm>
-          <a:prstGeom prst="rect">
-            <a:avLst/>
-          </a:prstGeom>
-          <a:noFill/>
-          <a:extLst>
-            <a:ext uri="{909E8E84-426E-40DD-AFC4-6F175D3DCCD1}">
-              <a14:hiddenFill xmlns:a14="http://schemas.microsoft.com/office/drawing/2010/main">
-                <a:solidFill>
-                  <a:srgbClr val="FFFFFF"/>
-                </a:solidFill>
-              </a14:hiddenFill>
-            </a:ext>
-          </a:extLst>
+        <p:spPr>
+          <a:xfrm>
+            <a:off x="4480560" y="4846320"/>
+            <a:ext cx="1920240" cy="722376"/>
+          </a:xfrm>
+          <a:prstGeom prst="rect">
+            <a:avLst/>
+          </a:prstGeom>
+        </p:spPr>
+      </p:pic>
+      <p:pic>
+        <p:nvPicPr>
+          <p:cNvPr id="9" name="Image 5" descr="assets/sf-white.png"/>
+          <p:cNvPicPr>
+            <a:picLocks noChangeAspect="1"/>
+          </p:cNvPicPr>
+          <p:nvPr/>
+        </p:nvPicPr>
+        <p:blipFill>
+          <a:blip r:embed="rId8"/>
+          <a:stretch>
+            <a:fillRect/>
+          </a:stretch>
+        </p:blipFill>
+        <p:spPr>
+          <a:xfrm>
+            <a:off x="8869680" y="5989320"/>
+            <a:ext cx="2743200" cy="376733"/>
+          </a:xfrm>
+          <a:prstGeom prst="rect">
+            <a:avLst/>
+          </a:prstGeom>
         </p:spPr>
       </p:pic>
     </p:spTree>
@@ -6584,7 +7193,7 @@
 
 <file path=ppt/slides/slide20.xml><?xml version="1.0" encoding="utf-8"?>
 <p:sld xmlns:a="http://schemas.openxmlformats.org/drawingml/2006/main" xmlns:r="http://schemas.openxmlformats.org/officeDocument/2006/relationships" xmlns:p="http://schemas.openxmlformats.org/presentationml/2006/main">
-  <p:cSld name="Slide 20">
+  <p:cSld name="Slide 21">
     <p:bg>
       <p:bgPr>
         <a:solidFill>
